--- a/docs/presentations_files/functional-requirements/VIA-functional-requirements-and-constraints.pptx
+++ b/docs/presentations_files/functional-requirements/VIA-functional-requirements-and-constraints.pptx
@@ -2,13 +2,13 @@
 <file path=ppt/presentation.xml><?xml version="1.0" encoding="utf-8"?>
 <p:presentation xmlns:p="http://schemas.openxmlformats.org/presentationml/2006/main">
   <p:sldMasterIdLst>
-    <p:sldMasterId xmlns:r="http://schemas.openxmlformats.org/officeDocument/2006/relationships" id="2147483648" r:id="R1a1899b72375481e"/>
+    <p:sldMasterId xmlns:r="http://schemas.openxmlformats.org/officeDocument/2006/relationships" id="2147483648" r:id="R7a7854a83f864a14"/>
   </p:sldMasterIdLst>
   <p:notesMasterIdLst>
-    <p:notesMasterId xmlns:r="http://schemas.openxmlformats.org/officeDocument/2006/relationships" r:id="R288f64ebe7a04b6b"/>
+    <p:notesMasterId xmlns:r="http://schemas.openxmlformats.org/officeDocument/2006/relationships" r:id="R9ecad5fc71f046e8"/>
   </p:notesMasterIdLst>
   <p:sldIdLst>
-    <p:sldId xmlns:r="http://schemas.openxmlformats.org/officeDocument/2006/relationships" id="256" r:id="R66f04170531a482b"/>
+    <p:sldId xmlns:r="http://schemas.openxmlformats.org/officeDocument/2006/relationships" id="256" r:id="R34b3822a122e42c3"/>
   </p:sldIdLst>
   <p:sldSz cx="18288000" cy="10287000"/>
   <p:notesSz cx="6858000" cy="9144000"/>
@@ -452,7 +452,7 @@
           </a:p>
           <a:p xmlns:a="http://schemas.openxmlformats.org/drawingml/2006/main">
             <a:r>
-              <a:t>04-41~45와 직접 연결되는 발표용 요구사항이다. 관련 DP는 직접적인 설계 영향의 연결이며 전체 준수 범위를 뜻하지 않는다. 단일 Omni 공유는 별도 입력 인식용 Streaming ASR을 금지한다는 뜻이 아니다. 특정 설계 대안의 선택 또는 구현 및 측정 결과를 나타내지 않는다.</a:t>
+              <a:t>현재 네 DP의 발표용 요구사항이다. 관련 DP는 직접적인 설계 영향의 연결이며 전체 준수 범위를 뜻하지 않는다. 모델 배치는 04-40 공통 실행 계약을 따른다. 로컬 VAD는 Interaction Manager의 Turn-Taking Control에 있고 Request, Task와 실제 전달의 권위는 로컬 VIA에 남는다. 음성 모델과 의미 LLM은 별도 클라우드 의존성이며 Model Access가 공급자 연동을 담당한다. 공급자 및 checkpoint를 기능 요구사항으로 고정하지 않는다. 특정 설계 대안의 선택 또는 구현 및 측정 결과를 나타내지 않는다.</a:t>
             </a:r>
           </a:p>
           <a:p xmlns:a="http://schemas.openxmlformats.org/drawingml/2006/main">
@@ -492,7 +492,7 @@
           </a:p>
           <a:p xmlns:a="http://schemas.openxmlformats.org/drawingml/2006/main">
             <a:r>
-              <a:t>관련 DP: 04-41, 04-43</a:t>
+              <a:t>관련 DP: 04-41</a:t>
             </a:r>
           </a:p>
           <a:p xmlns:a="http://schemas.openxmlformats.org/drawingml/2006/main">
@@ -512,7 +512,7 @@
           </a:p>
           <a:p xmlns:a="http://schemas.openxmlformats.org/drawingml/2006/main">
             <a:r>
-              <a:t>관련 DP: 04-41, 04-43, 04-44</a:t>
+              <a:t>관련 DP: 04-41, 04-44</a:t>
             </a:r>
           </a:p>
           <a:p xmlns:a="http://schemas.openxmlformats.org/drawingml/2006/main">
@@ -532,7 +532,7 @@
           </a:p>
           <a:p xmlns:a="http://schemas.openxmlformats.org/drawingml/2006/main">
             <a:r>
-              <a:t>관련 DP: 04-42, 04-43, 04-44</a:t>
+              <a:t>관련 DP: 04-42, 04-44</a:t>
             </a:r>
           </a:p>
           <a:p xmlns:a="http://schemas.openxmlformats.org/drawingml/2006/main">
@@ -582,17 +582,17 @@
           </a:p>
           <a:p xmlns:a="http://schemas.openxmlformats.org/drawingml/2006/main">
             <a:r>
-              <a:t>C1 온디바이스 Omni 공유</a:t>
-            </a:r>
-          </a:p>
-          <a:p xmlns:a="http://schemas.openxmlformats.org/drawingml/2006/main">
-            <a:r>
-              <a:t>음성 대화와 요청 의미 해석은 사용자 PC에 적재된 하나의 Omni 모델 가중치를 공유해야 한다.</a:t>
-            </a:r>
-          </a:p>
-          <a:p xmlns:a="http://schemas.openxmlformats.org/drawingml/2006/main">
-            <a:r>
-              <a:t>관련 DP: 04-41, 04-43, 04-44, 04-45</a:t>
+              <a:t>C1 음성과 의미 모델 분리</a:t>
+            </a:r>
+          </a:p>
+          <a:p xmlns:a="http://schemas.openxmlformats.org/drawingml/2006/main">
+            <a:r>
+              <a:t>VIA와 VAD는 사용자 PC에서 실행하고, 음성과 의미 해석은 별도 클라우드 모델을 Model Access를 통해 사용해야 한다.</a:t>
+            </a:r>
+          </a:p>
+          <a:p xmlns:a="http://schemas.openxmlformats.org/drawingml/2006/main">
+            <a:r>
+              <a:t>관련 DP: 04-41, 04-44, 04-45</a:t>
             </a:r>
           </a:p>
           <a:p xmlns:a="http://schemas.openxmlformats.org/drawingml/2006/main">
@@ -612,7 +612,7 @@
           </a:p>
           <a:p xmlns:a="http://schemas.openxmlformats.org/drawingml/2006/main">
             <a:r>
-              <a:t>관련 DP: 04-41, 04-42, 04-43</a:t>
+              <a:t>관련 DP: 04-41, 04-42, 04-44</a:t>
             </a:r>
           </a:p>
           <a:p xmlns:a="http://schemas.openxmlformats.org/drawingml/2006/main">
@@ -638,11 +638,6 @@
           <a:p xmlns:a="http://schemas.openxmlformats.org/drawingml/2006/main">
             <a:r>
               <a:t>- [04-42 대화와 업무의 수명](../architecture/12-decisions/decision-packages/04-42-lifecycle-ownership.md)</a:t>
-            </a:r>
-          </a:p>
-          <a:p xmlns:a="http://schemas.openxmlformats.org/drawingml/2006/main">
-            <a:r>
-              <a:t>- [04-43 요청 이해의 판단 책임](../architecture/12-decisions/decision-packages/04-43-request-interpretation.md)</a:t>
             </a:r>
           </a:p>
           <a:p xmlns:a="http://schemas.openxmlformats.org/drawingml/2006/main">
@@ -730,7 +725,7 @@
   </p:cSld>
   <p:clrMap bg1="lt1" tx1="dk1" bg2="lt2" tx2="dk2" accent1="accent1" accent2="accent2" accent3="accent3" accent4="accent4" accent5="accent5" accent6="accent6" hlink="hlink" folHlink="folHlink"/>
   <p:sldLayoutIdLst>
-    <p:sldLayoutId xmlns:r="http://schemas.openxmlformats.org/officeDocument/2006/relationships" id="2147483649" r:id="R8005d6fd879c4776"/>
+    <p:sldLayoutId xmlns:r="http://schemas.openxmlformats.org/officeDocument/2006/relationships" id="2147483649" r:id="R0cce4c37d09c4e32"/>
   </p:sldLayoutIdLst>
   <p:txStyles>
     <p:titleStyle>
@@ -1281,7 +1276,7 @@
           <p:cNvPr id="7" name="title">
             <a:extLst xmlns:a="http://schemas.openxmlformats.org/drawingml/2006/main">
               <a:ext uri="{FF2B5EF4-FFF2-40B4-BE49-F238E27FC236}">
-                <a16:creationId xmlns:a16="http://schemas.microsoft.com/office/drawing/2014/main" id="{D7A081B1-32D6-4647-BF3C-4BDC8B1CFD85}"/>
+                <a16:creationId xmlns:a16="http://schemas.microsoft.com/office/drawing/2014/main" id="{4092BEB7-8E0A-41CB-A00E-B902962BF04A}"/>
               </a:ext>
             </a:extLst>
           </p:cNvPr>
@@ -1338,7 +1333,7 @@
           <p:cNvPr id="2" name="functional-heading">
             <a:extLst xmlns:a="http://schemas.openxmlformats.org/drawingml/2006/main">
               <a:ext uri="{FF2B5EF4-FFF2-40B4-BE49-F238E27FC236}">
-                <a16:creationId xmlns:a16="http://schemas.microsoft.com/office/drawing/2014/main" id="{C21D7758-B9C9-4B05-8BF3-17D954E2D432}"/>
+                <a16:creationId xmlns:a16="http://schemas.microsoft.com/office/drawing/2014/main" id="{D342F900-6824-479E-8844-5EB8A5366A74}"/>
               </a:ext>
             </a:extLst>
           </p:cNvPr>
@@ -1733,7 +1728,7 @@
                           <a:ea typeface="Apple SD Gothic Neo"/>
                           <a:cs typeface="Apple SD Gothic Neo"/>
                         </a:rPr>
-                        <a:t>04-41, 04-43</a:t>
+                        <a:t>04-41</a:t>
                       </a:r>
                     </a:p>
                   </a:txBody>
@@ -1849,21 +1844,7 @@
                           <a:ea typeface="Apple SD Gothic Neo"/>
                           <a:cs typeface="Apple SD Gothic Neo"/>
                         </a:rPr>
-                        <a:t>04-41, 04-43,</a:t>
-                      </a:r>
-                    </a:p>
-                    <a:p>
-                      <a:pPr algn="ctr"/>
-                      <a:r>
-                        <a:rPr sz="1950" b="0">
-                          <a:solidFill>
-                            <a:srgbClr val="202B35"/>
-                          </a:solidFill>
-                          <a:latin typeface="Apple SD Gothic Neo"/>
-                          <a:ea typeface="Apple SD Gothic Neo"/>
-                          <a:cs typeface="Apple SD Gothic Neo"/>
-                        </a:rPr>
-                        <a:t>04-44</a:t>
+                        <a:t>04-41, 04-44</a:t>
                       </a:r>
                     </a:p>
                   </a:txBody>
@@ -1979,21 +1960,7 @@
                           <a:ea typeface="Apple SD Gothic Neo"/>
                           <a:cs typeface="Apple SD Gothic Neo"/>
                         </a:rPr>
-                        <a:t>04-42, 04-43,</a:t>
-                      </a:r>
-                    </a:p>
-                    <a:p>
-                      <a:pPr algn="ctr"/>
-                      <a:r>
-                        <a:rPr sz="1950" b="0">
-                          <a:solidFill>
-                            <a:srgbClr val="202B35"/>
-                          </a:solidFill>
-                          <a:latin typeface="Apple SD Gothic Neo"/>
-                          <a:ea typeface="Apple SD Gothic Neo"/>
-                          <a:cs typeface="Apple SD Gothic Neo"/>
-                        </a:rPr>
-                        <a:t>04-44</a:t>
+                        <a:t>04-42, 04-44</a:t>
                       </a:r>
                     </a:p>
                   </a:txBody>
@@ -2245,7 +2212,7 @@
           <p:cNvPr id="4" name="constraints-heading">
             <a:extLst xmlns:a="http://schemas.openxmlformats.org/drawingml/2006/main">
               <a:ext uri="{FF2B5EF4-FFF2-40B4-BE49-F238E27FC236}">
-                <a16:creationId xmlns:a16="http://schemas.microsoft.com/office/drawing/2014/main" id="{37CDE1A5-7772-4A42-AFC8-001B437AFC59}"/>
+                <a16:creationId xmlns:a16="http://schemas.microsoft.com/office/drawing/2014/main" id="{D36FAAF4-C26E-41F6-BBE5-D3138EC855F1}"/>
               </a:ext>
             </a:extLst>
           </p:cNvPr>
@@ -2460,7 +2427,7 @@
                           <a:ea typeface="Apple SD Gothic Neo"/>
                           <a:cs typeface="Apple SD Gothic Neo"/>
                         </a:rPr>
-                        <a:t>온디바이스 Omni 공유</a:t>
+                        <a:t>음성과 의미 모델 분리</a:t>
                       </a:r>
                     </a:p>
                   </a:txBody>
@@ -2485,7 +2452,7 @@
                           <a:ea typeface="Apple SD Gothic Neo"/>
                           <a:cs typeface="Apple SD Gothic Neo"/>
                         </a:rPr>
-                        <a:t>음성 대화와 요청 의미 해석은 사용자 PC에 적재된 하나의</a:t>
+                        <a:t>VIA와 VAD는 사용자 PC에서 실행하고, 음성과 의미 해석은 별도 클라우드 모델을</a:t>
                       </a:r>
                     </a:p>
                     <a:p>
@@ -2499,7 +2466,7 @@
                           <a:ea typeface="Apple SD Gothic Neo"/>
                           <a:cs typeface="Apple SD Gothic Neo"/>
                         </a:rPr>
-                        <a:t>Omni 모델 가중치를 공유해야 한다.</a:t>
+                        <a:t>Model Access를 통해 사용해야 한다.</a:t>
                       </a:r>
                     </a:p>
                   </a:txBody>
@@ -2524,7 +2491,7 @@
                           <a:ea typeface="Apple SD Gothic Neo"/>
                           <a:cs typeface="Apple SD Gothic Neo"/>
                         </a:rPr>
-                        <a:t>04-41, 04-43,</a:t>
+                        <a:t>04-41, 04-44,</a:t>
                       </a:r>
                     </a:p>
                     <a:p>
@@ -2538,7 +2505,7 @@
                           <a:ea typeface="Apple SD Gothic Neo"/>
                           <a:cs typeface="Apple SD Gothic Neo"/>
                         </a:rPr>
-                        <a:t>04-44, 04-45</a:t>
+                        <a:t>04-45</a:t>
                       </a:r>
                     </a:p>
                   </a:txBody>
@@ -2668,7 +2635,7 @@
                           <a:ea typeface="Apple SD Gothic Neo"/>
                           <a:cs typeface="Apple SD Gothic Neo"/>
                         </a:rPr>
-                        <a:t>04-43</a:t>
+                        <a:t>04-44</a:t>
                       </a:r>
                     </a:p>
                   </a:txBody>
@@ -2688,7 +2655,7 @@
           <p:cNvPr id="6" name="mapping-boundary">
             <a:extLst xmlns:a="http://schemas.openxmlformats.org/drawingml/2006/main">
               <a:ext uri="{FF2B5EF4-FFF2-40B4-BE49-F238E27FC236}">
-                <a16:creationId xmlns:a16="http://schemas.microsoft.com/office/drawing/2014/main" id="{2CBC0817-0C4B-4E8F-990F-D21CEE4D9CD9}"/>
+                <a16:creationId xmlns:a16="http://schemas.microsoft.com/office/drawing/2014/main" id="{07A64B9E-7E9D-41F7-8E41-80C979F479CA}"/>
               </a:ext>
             </a:extLst>
           </p:cNvPr>
@@ -2735,7 +2702,7 @@
                 <a:ea typeface="Apple SD Gothic Neo"/>
                 <a:cs typeface="Apple SD Gothic Neo"/>
               </a:rPr>
-              <a:t>관련 DP는 직접 설계 영향만 표시하며, Omni 공유는 별도 Streaming ASR을 금지하지 않는다.</a:t>
+              <a:t>관련 DP는 직접 설계 영향만 표시한다. 로컬 VAD와 업무 상태의 권위는 VIA에 있으며 모델 공급자는 별도 reference다.</a:t>
             </a:r>
           </a:p>
         </p:txBody>
@@ -2743,7 +2710,7 @@
     </p:spTree>
     <p:extLst>
       <p:ext uri="{BB962C8B-B14F-4D97-AF65-F5344CB8AC3E}">
-        <p14:creationId xmlns:p14="http://schemas.microsoft.com/office/powerpoint/2010/main" val="1789254256"/>
+        <p14:creationId xmlns:p14="http://schemas.microsoft.com/office/powerpoint/2010/main" val="1503880560"/>
       </p:ext>
     </p:extLst>
   </p:cSld>
